--- a/public/materialy/1L/10/Prezentace k hodinám/1. Základy AI a učení z dat.pptx
+++ b/public/materialy/1L/10/Prezentace k hodinám/1. Základy AI a učení z dat.pptx
@@ -548,7 +548,7 @@
           </a:p>
           <a:p xmlns:a="http://schemas.openxmlformats.org/drawingml/2006/main">
             <a:r>
-              <a:t>Podklady: 01_laborator_fungovani_AI.html, 01_trenovaci_data.csv</a:t>
+              <a:t>Podklady: 1. Laboratoř fungování AI.html, 1. Trénovací data.csv</a:t>
             </a:r>
           </a:p>
           <a:p xmlns:a="http://schemas.openxmlformats.org/drawingml/2006/main">
@@ -578,7 +578,7 @@
           </a:p>
           <a:p xmlns:a="http://schemas.openxmlformats.org/drawingml/2006/main">
             <a:r>
-              <a:t>AI_Fluency__Key_Terminology_Cheat_Sheet.pdf</a:t>
+              <a:t>AI_Fluency_Key_Terminology_Cheat_Sheet.pdf</a:t>
             </a:r>
           </a:p>
           <a:p xmlns:a="http://schemas.openxmlformats.org/drawingml/2006/main">
@@ -698,7 +698,7 @@
           </a:p>
           <a:p xmlns:a="http://schemas.openxmlformats.org/drawingml/2006/main">
             <a:r>
-              <a:t>AI_Fluency__Key_Terminology_Cheat_Sheet.pdf</a:t>
+              <a:t>AI_Fluency_Key_Terminology_Cheat_Sheet.pdf</a:t>
             </a:r>
           </a:p>
           <a:p xmlns:a="http://schemas.openxmlformats.org/drawingml/2006/main">
@@ -818,7 +818,7 @@
           </a:p>
           <a:p xmlns:a="http://schemas.openxmlformats.org/drawingml/2006/main">
             <a:r>
-              <a:t>AI_Fluency__Key_Terminology_Cheat_Sheet.pdf</a:t>
+              <a:t>AI_Fluency_Key_Terminology_Cheat_Sheet.pdf</a:t>
             </a:r>
           </a:p>
           <a:p xmlns:a="http://schemas.openxmlformats.org/drawingml/2006/main">
@@ -903,7 +903,7 @@
           <a:lstStyle xmlns:a="http://schemas.openxmlformats.org/drawingml/2006/main"/>
           <a:p xmlns:a="http://schemas.openxmlformats.org/drawingml/2006/main">
             <a:r>
-              <a:t>Podklady: 01_laborator_fungovani_AI.html, 01_trenovaci_data.csv</a:t>
+              <a:t>Podklady: 1. Laboratoř fungování AI.html, 1. Trénovací data.csv</a:t>
             </a:r>
           </a:p>
           <a:p xmlns:a="http://schemas.openxmlformats.org/drawingml/2006/main">
@@ -913,7 +913,7 @@
           </a:p>
           <a:p xmlns:a="http://schemas.openxmlformats.org/drawingml/2006/main">
             <a:r>
-              <a:t>2. Otevři 01_trenovaci_data.csv a označ příklady, které model při trénování viděl.</a:t>
+              <a:t>2. Otevři 1. Trénovací data.csv a označ příklady, které model při trénování viděl.</a:t>
             </a:r>
           </a:p>
           <a:p xmlns:a="http://schemas.openxmlformats.org/drawingml/2006/main">
@@ -953,7 +953,7 @@
           </a:p>
           <a:p xmlns:a="http://schemas.openxmlformats.org/drawingml/2006/main">
             <a:r>
-              <a:t>AI_Fluency__Key_Terminology_Cheat_Sheet.pdf</a:t>
+              <a:t>AI_Fluency_Key_Terminology_Cheat_Sheet.pdf</a:t>
             </a:r>
           </a:p>
           <a:p xmlns:a="http://schemas.openxmlformats.org/drawingml/2006/main">
@@ -1078,7 +1078,7 @@
           </a:p>
           <a:p xmlns:a="http://schemas.openxmlformats.org/drawingml/2006/main">
             <a:r>
-              <a:t>AI_Fluency__Key_Terminology_Cheat_Sheet.pdf</a:t>
+              <a:t>AI_Fluency_Key_Terminology_Cheat_Sheet.pdf</a:t>
             </a:r>
           </a:p>
           <a:p xmlns:a="http://schemas.openxmlformats.org/drawingml/2006/main">
@@ -1193,7 +1193,7 @@
           </a:p>
           <a:p xmlns:a="http://schemas.openxmlformats.org/drawingml/2006/main">
             <a:r>
-              <a:t>AI_Fluency__Key_Terminology_Cheat_Sheet.pdf</a:t>
+              <a:t>AI_Fluency_Key_Terminology_Cheat_Sheet.pdf</a:t>
             </a:r>
           </a:p>
           <a:p xmlns:a="http://schemas.openxmlformats.org/drawingml/2006/main">
@@ -1308,7 +1308,7 @@
           </a:p>
           <a:p xmlns:a="http://schemas.openxmlformats.org/drawingml/2006/main">
             <a:r>
-              <a:t>AI_Fluency__Key_Terminology_Cheat_Sheet.pdf</a:t>
+              <a:t>AI_Fluency_Key_Terminology_Cheat_Sheet.pdf</a:t>
             </a:r>
           </a:p>
           <a:p xmlns:a="http://schemas.openxmlformats.org/drawingml/2006/main">
@@ -4040,7 +4040,7 @@
               </a:defRPr>
             </a:pPr>
             <a:r>
-              <a:t>01_laborator_fungovani_AI.html · 01_trenovaci_data.csv</a:t>
+              <a:t>1. Laboratoř fungování AI.html · 1. Trénovací data.csv</a:t>
             </a:r>
           </a:p>
         </p:txBody>
@@ -4286,7 +4286,7 @@
               </a:defRPr>
             </a:pPr>
             <a:r>
-              <a:t>Otevři 01_trenovaci_data.csv a označ příklady, které model při trénování viděl.</a:t>
+              <a:t>Otevři 1. Trénovací data.csv a označ příklady, které model při trénování viděl.</a:t>
             </a:r>
           </a:p>
         </p:txBody>

--- a/public/materialy/1L/10/Prezentace k hodinám/1. Základy AI a učení z dat.pptx
+++ b/public/materialy/1L/10/Prezentace k hodinám/1. Základy AI a učení z dat.pptx
@@ -558,7 +558,7 @@
           </a:p>
           <a:p xmlns:a="http://schemas.openxmlformats.org/drawingml/2006/main">
             <a:r>
-              <a:t>Před začátkem ověřte, že studenti mají otevřený digitální pracovní sešit a potřebné soubory.</a:t>
+              <a:t>Před začátkem ověř, že studenti mají otevřený digitální pracovní sešit a potřebné soubory.</a:t>
             </a:r>
           </a:p>
           <a:p xmlns:a="http://schemas.openxmlformats.org/drawingml/2006/main">
@@ -668,7 +668,7 @@
           </a:p>
           <a:p xmlns:a="http://schemas.openxmlformats.org/drawingml/2006/main">
             <a:r>
-              <a:t>Postup: Zobrazte tři běžné funkce a nechte studenty hlasovat bez okamžité opravy.</a:t>
+              <a:t>Postup: Zobraz tři běžné funkce a nech studenty hlasovat bez okamžité opravy.</a:t>
             </a:r>
           </a:p>
           <a:p xmlns:a="http://schemas.openxmlformats.org/drawingml/2006/main">
@@ -678,7 +678,7 @@
           </a:p>
           <a:p xmlns:a="http://schemas.openxmlformats.org/drawingml/2006/main">
             <a:r>
-              <a:t>Neprozrazujte odpověď. Cílem je zachytit počáteční model studenta, ke kterému se vrátí při reflexi.</a:t>
+              <a:t>Neprozrazuj odpověď. Cílem je zachytit počáteční model studenta, ke kterému se vrátí při reflexi.</a:t>
             </a:r>
           </a:p>
           <a:p xmlns:a="http://schemas.openxmlformats.org/drawingml/2006/main">
@@ -788,7 +788,7 @@
           </a:p>
           <a:p xmlns:a="http://schemas.openxmlformats.org/drawingml/2006/main">
             <a:r>
-              <a:t>Postup: Vymezte algoritmus, klasickou AI a generativní AI pomocí kontrastních příkladů.</a:t>
+              <a:t>Postup: Vymez algoritmus, klasickou AI a generativní AI pomocí kontrastních příkladů.</a:t>
             </a:r>
           </a:p>
           <a:p xmlns:a="http://schemas.openxmlformats.org/drawingml/2006/main">
@@ -798,7 +798,7 @@
           </a:p>
           <a:p xmlns:a="http://schemas.openxmlformats.org/drawingml/2006/main">
             <a:r>
-              <a:t>Po každém pojmu vyžádejte jeden příklad a jeden protipříklad. Vysvětlení má používat způsob fungování, ne značku nástroje.</a:t>
+              <a:t>Po každém pojmu vyžádej jeden příklad a jeden protipříklad. Vysvětlení má používat způsob fungování, ne značku nástroje.</a:t>
             </a:r>
           </a:p>
           <a:p xmlns:a="http://schemas.openxmlformats.org/drawingml/2006/main">
@@ -933,7 +933,7 @@
           </a:p>
           <a:p xmlns:a="http://schemas.openxmlformats.org/drawingml/2006/main">
             <a:r>
-              <a:t>Během práce pomáhejte otázkami, nepřebírejte myš ani tvorbu promptu. Vyžadujte průběžné ukládání výstupů a lidských rozhodnutí.</a:t>
+              <a:t>Během práce pomáhej otázkami, nepřebírej myš ani tvorbu promptu. Vyžaduj průběžné ukládání výstupů a lidských rozhodnutí.</a:t>
             </a:r>
           </a:p>
           <a:p xmlns:a="http://schemas.openxmlformats.org/drawingml/2006/main">
@@ -1048,7 +1048,7 @@
           </a:p>
           <a:p xmlns:a="http://schemas.openxmlformats.org/drawingml/2006/main">
             <a:r>
-              <a:t>Podpora: Nabídněte barevný tok data → trénování → model → inference a jeden vyřešený příklad.</a:t>
+              <a:t>Podpora: Nabídni barevný tok data → trénování → model → inference a jeden vyřešený příklad.</a:t>
             </a:r>
           </a:p>
           <a:p xmlns:a="http://schemas.openxmlformats.org/drawingml/2006/main">
@@ -1058,7 +1058,7 @@
           </a:p>
           <a:p xmlns:a="http://schemas.openxmlformats.org/drawingml/2006/main">
             <a:r>
-              <a:t>Proveďte rychlou párovou kontrolu: jeden dobře doložený bod a jedna konkrétní otázka k dopracování.</a:t>
+              <a:t>Proveď rychlou párovou kontrolu: jeden dobře doložený bod a jedna konkrétní otázka k dopracování.</a:t>
             </a:r>
           </a:p>
           <a:p xmlns:a="http://schemas.openxmlformats.org/drawingml/2006/main">
@@ -1168,12 +1168,12 @@
           </a:p>
           <a:p xmlns:a="http://schemas.openxmlformats.org/drawingml/2006/main">
             <a:r>
-              <a:t>Časté omyly: „Když je něco automatické, je to AI.“ → Ptejte se, zda systém používá naučený model, nebo pouze explicitní pravidla. | „Model si uloží tabulku všech správných odpovědí.“ → Ukažte nový případ a nechte studenta popsat zobecněný vzor.</a:t>
-            </a:r>
-          </a:p>
-          <a:p xmlns:a="http://schemas.openxmlformats.org/drawingml/2006/main">
-            <a:r>
-              <a:t>Nečtěte řešení slovo od slova. Porovnejte dva studentské postupy a nechte třídu určit, který má lepší důkazy nebo jasnější lidské rozhodnutí.</a:t>
+              <a:t>Časté omyly: „Když je něco automatické, je to AI.“ → Ptej se, zda systém používá naučený model, nebo pouze explicitní pravidla. | „Model si uloží tabulku všech správných odpovědí.“ → Ukaž nový případ a nech studenta popsat zobecněný vzor.</a:t>
+            </a:r>
+          </a:p>
+          <a:p xmlns:a="http://schemas.openxmlformats.org/drawingml/2006/main">
+            <a:r>
+              <a:t>Nečti řešení slovo od slova. Porovnej dva studentské postupy a nech třídu určit, který má lepší důkazy nebo jasnější lidské rozhodnutí.</a:t>
             </a:r>
           </a:p>
           <a:p xmlns:a="http://schemas.openxmlformats.org/drawingml/2006/main">
@@ -1283,12 +1283,12 @@
           </a:p>
           <a:p xmlns:a="http://schemas.openxmlformats.org/drawingml/2006/main">
             <a:r>
-              <a:t>Když technika selže: Použijte tabulky v pracovním sešitu a průběh simulace promítněte z prezentace.</a:t>
-            </a:r>
-          </a:p>
-          <a:p xmlns:a="http://schemas.openxmlformats.org/drawingml/2006/main">
-            <a:r>
-              <a:t>Odpovědi použijte jako diagnostiku pro začátek další hodiny. U hodiny 3 navazuje diagnostická brána; u hodiny 6 jde o součást závěrečné reflexe.</a:t>
+              <a:t>Když technika selže: Použij tabulky v pracovním sešitu a průběh simulace promítni z prezentace.</a:t>
+            </a:r>
+          </a:p>
+          <a:p xmlns:a="http://schemas.openxmlformats.org/drawingml/2006/main">
+            <a:r>
+              <a:t>Odpovědi použij jako diagnostiku pro začátek další hodiny. U hodiny 3 navazuje diagnostická brána; u hodiny 6 jde o součást závěrečné reflexe.</a:t>
             </a:r>
           </a:p>
           <a:p xmlns:a="http://schemas.openxmlformats.org/drawingml/2006/main">
